--- a/02 Osnove Informacione Bezbednosti/02 Prezentacije/PPTX/08_Korelacija_efektivnost_i_ucenje.pptx
+++ b/02 Osnove Informacione Bezbednosti/02 Prezentacije/PPTX/08_Korelacija_efektivnost_i_ucenje.pptx
@@ -7255,7 +7255,7 @@
                 <a:ea typeface="Aptos"/>
                 <a:cs typeface="Aptos"/>
               </a:rPr>
-              <a:t>Корелација повезује догађаје по времену, актеру, ресурсу и идентификатору тока.</a:t>
+              <a:t>Корелација групише догађаје по идентификатору тока и бележи њихове типове.</a:t>
             </a:r>
           </a:p>
         </p:txBody>
@@ -7277,7 +7277,7 @@
         <p:spPr>
           <a:xfrm xmlns:a="http://schemas.openxmlformats.org/drawingml/2006/main">
             <a:off x="666750" y="2095500"/>
-            <a:ext cx="6858000" cy="2133600"/>
+            <a:ext cx="6858000" cy="2647450"/>
           </a:xfrm>
           <a:prstGeom xmlns:a="http://schemas.openxmlformats.org/drawingml/2006/main" prst="roundRect">
             <a:avLst>
@@ -7459,7 +7459,7 @@
           <a:p xmlns:a="http://schemas.openxmlformats.org/drawingml/2006/main">
             <a:pPr algn="r">
               <a:lnSpc>
-                <a:spcPct val="100000"/>
+                <a:spcPts val="1300"/>
               </a:lnSpc>
               <a:buNone/>
               <a:defRPr sz="975" b="0">
@@ -7486,7 +7486,7 @@
           <a:p xmlns:a="http://schemas.openxmlformats.org/drawingml/2006/main">
             <a:pPr algn="r">
               <a:lnSpc>
-                <a:spcPct val="100000"/>
+                <a:spcPts val="1300"/>
               </a:lnSpc>
               <a:buNone/>
               <a:defRPr sz="975" b="0">
@@ -7513,7 +7513,7 @@
           <a:p xmlns:a="http://schemas.openxmlformats.org/drawingml/2006/main">
             <a:pPr algn="r">
               <a:lnSpc>
-                <a:spcPct val="100000"/>
+                <a:spcPts val="1300"/>
               </a:lnSpc>
               <a:buNone/>
               <a:defRPr sz="975" b="0">
@@ -7540,7 +7540,7 @@
           <a:p xmlns:a="http://schemas.openxmlformats.org/drawingml/2006/main">
             <a:pPr algn="r">
               <a:lnSpc>
-                <a:spcPct val="100000"/>
+                <a:spcPts val="1300"/>
               </a:lnSpc>
               <a:buNone/>
               <a:defRPr sz="975" b="0">
@@ -7567,7 +7567,7 @@
           <a:p xmlns:a="http://schemas.openxmlformats.org/drawingml/2006/main">
             <a:pPr algn="r">
               <a:lnSpc>
-                <a:spcPct val="100000"/>
+                <a:spcPts val="1300"/>
               </a:lnSpc>
               <a:buNone/>
               <a:defRPr sz="975" b="0">
@@ -7594,7 +7594,7 @@
           <a:p xmlns:a="http://schemas.openxmlformats.org/drawingml/2006/main">
             <a:pPr algn="r">
               <a:lnSpc>
-                <a:spcPct val="100000"/>
+                <a:spcPts val="1300"/>
               </a:lnSpc>
               <a:buNone/>
               <a:defRPr sz="975" b="0">
@@ -7621,7 +7621,7 @@
           <a:p xmlns:a="http://schemas.openxmlformats.org/drawingml/2006/main">
             <a:pPr algn="r">
               <a:lnSpc>
-                <a:spcPct val="100000"/>
+                <a:spcPts val="1300"/>
               </a:lnSpc>
               <a:buNone/>
               <a:defRPr sz="975" b="0">
@@ -7648,7 +7648,7 @@
           <a:p xmlns:a="http://schemas.openxmlformats.org/drawingml/2006/main">
             <a:pPr algn="r">
               <a:lnSpc>
-                <a:spcPct val="100000"/>
+                <a:spcPts val="1300"/>
               </a:lnSpc>
               <a:buNone/>
               <a:defRPr sz="975" b="0">
@@ -7675,7 +7675,7 @@
           <a:p xmlns:a="http://schemas.openxmlformats.org/drawingml/2006/main">
             <a:pPr algn="r">
               <a:lnSpc>
-                <a:spcPct val="100000"/>
+                <a:spcPts val="1300"/>
               </a:lnSpc>
               <a:buNone/>
               <a:defRPr sz="975" b="0">
@@ -7699,46 +7699,15 @@
               <a:t>9</a:t>
             </a:r>
           </a:p>
-        </p:txBody>
-      </p:sp>
-      <p:sp>
-        <p:nvSpPr>
-          <p:cNvPr id="12" name="Rectangle 11">
-            <a:extLst xmlns:a="http://schemas.openxmlformats.org/drawingml/2006/main">
-              <a:ext uri="{FF2B5EF4-FFF2-40B4-BE49-F238E27FC236}">
-                <a16:creationId xmlns:a16="http://schemas.microsoft.com/office/drawing/2014/main" id="{4D46582C-A5A4-4CB7-A21B-E1F5D3852278}"/>
-              </a:ext>
-            </a:extLst>
-          </p:cNvPr>
-          <p:cNvSpPr>
-            <a:spLocks xmlns:a="http://schemas.openxmlformats.org/drawingml/2006/main" noGrp="1"/>
-          </p:cNvSpPr>
-          <p:nvPr/>
-        </p:nvSpPr>
-        <p:spPr>
-          <a:xfrm xmlns:a="http://schemas.openxmlformats.org/drawingml/2006/main">
-            <a:off x="1200150" y="2571750"/>
-            <a:ext cx="6153150" cy="3028950"/>
-          </a:xfrm>
-          <a:prstGeom xmlns:a="http://schemas.openxmlformats.org/drawingml/2006/main" prst="rect">
-            <a:avLst/>
-          </a:prstGeom>
-          <a:noFill xmlns:a="http://schemas.openxmlformats.org/drawingml/2006/main"/>
-          <a:ln xmlns:a="http://schemas.openxmlformats.org/drawingml/2006/main" w="0">
-            <a:noFill/>
-          </a:ln>
-        </p:spPr>
-        <p:txBody>
-          <a:bodyPr xmlns:a="http://schemas.openxmlformats.org/drawingml/2006/main" wrap="square" lIns="0" tIns="0" rIns="0" bIns="0" anchor="t">
-            <a:normAutofit/>
-          </a:bodyPr>
-          <a:lstStyle xmlns:a="http://schemas.openxmlformats.org/drawingml/2006/main"/>
-          <a:p xmlns:a="http://schemas.openxmlformats.org/drawingml/2006/main">
-            <a:pPr>
-              <a:buNone/>
-              <a:defRPr sz="1050">
-                <a:solidFill>
-                  <a:srgbClr val="263044"/>
+          <a:p xmlns:a="http://schemas.openxmlformats.org/drawingml/2006/main">
+            <a:pPr algn="r">
+              <a:lnSpc>
+                <a:spcPts val="1300"/>
+              </a:lnSpc>
+              <a:buNone/>
+              <a:defRPr sz="975" b="0">
+                <a:solidFill>
+                  <a:srgbClr val="8792A6"/>
                 </a:solidFill>
                 <a:latin typeface="Consolas"/>
                 <a:ea typeface="Consolas"/>
@@ -7746,113 +7715,26 @@
               </a:defRPr>
             </a:pPr>
             <a:r>
-              <a:rPr b="1">
-                <a:solidFill>
-                  <a:srgbClr val="0969C3"/>
-                </a:solidFill>
-              </a:rPr>
-              <a:t>public</a:t>
-            </a:r>
-            <a:r>
-              <a:rPr b="0">
-                <a:solidFill>
-                  <a:srgbClr val="263044"/>
-                </a:solidFill>
-              </a:rPr>
-              <a:t> </a:t>
-            </a:r>
-            <a:r>
-              <a:rPr b="0">
-                <a:solidFill>
-                  <a:srgbClr val="7651D4"/>
-                </a:solidFill>
-              </a:rPr>
-              <a:t>Finding</a:t>
-            </a:r>
-            <a:r>
-              <a:rPr b="0">
-                <a:solidFill>
-                  <a:srgbClr val="263044"/>
-                </a:solidFill>
-              </a:rPr>
-              <a:t> </a:t>
-            </a:r>
-            <a:r>
-              <a:rPr b="0">
-                <a:solidFill>
-                  <a:srgbClr val="7651D4"/>
-                </a:solidFill>
-              </a:rPr>
-              <a:t>Correlate</a:t>
-            </a:r>
-            <a:r>
-              <a:rPr b="0">
-                <a:solidFill>
-                  <a:srgbClr val="263044"/>
-                </a:solidFill>
-              </a:rPr>
-              <a:t>(</a:t>
-            </a:r>
-            <a:r>
-              <a:rPr b="0">
-                <a:solidFill>
-                  <a:srgbClr val="7651D4"/>
-                </a:solidFill>
-              </a:rPr>
-              <a:t>IEnumerable</a:t>
-            </a:r>
-            <a:r>
-              <a:rPr b="0">
-                <a:solidFill>
-                  <a:srgbClr val="263044"/>
-                </a:solidFill>
-              </a:rPr>
-              <a:t>&lt;</a:t>
-            </a:r>
-            <a:r>
-              <a:rPr b="0">
-                <a:solidFill>
-                  <a:srgbClr val="7651D4"/>
-                </a:solidFill>
-              </a:rPr>
-              <a:t>Event</a:t>
-            </a:r>
-            <a:r>
-              <a:rPr b="0">
-                <a:solidFill>
-                  <a:srgbClr val="263044"/>
-                </a:solidFill>
-              </a:rPr>
-              <a:t>&gt; events)</a:t>
-            </a:r>
-          </a:p>
-          <a:p xmlns:a="http://schemas.openxmlformats.org/drawingml/2006/main">
-            <a:pPr>
-              <a:buNone/>
-              <a:defRPr sz="1050">
-                <a:solidFill>
-                  <a:srgbClr val="263044"/>
+              <a:rPr sz="975" b="0">
+                <a:solidFill>
+                  <a:srgbClr val="8792A6"/>
                 </a:solidFill>
                 <a:latin typeface="Consolas"/>
                 <a:ea typeface="Consolas"/>
                 <a:cs typeface="Consolas"/>
-              </a:defRPr>
-            </a:pPr>
-            <a:r>
-              <a:rPr b="0">
-                <a:solidFill>
-                  <a:srgbClr val="263044"/>
-                </a:solidFill>
-              </a:rPr>
-              <a:t>{</a:t>
-            </a:r>
-          </a:p>
-          <a:p xmlns:a="http://schemas.openxmlformats.org/drawingml/2006/main">
-            <a:pPr>
-              <a:buNone/>
-              <a:defRPr sz="1050">
-                <a:solidFill>
-                  <a:srgbClr val="263044"/>
+              </a:rPr>
+              <a:t>10</a:t>
+            </a:r>
+          </a:p>
+          <a:p xmlns:a="http://schemas.openxmlformats.org/drawingml/2006/main">
+            <a:pPr algn="r">
+              <a:lnSpc>
+                <a:spcPts val="1300"/>
+              </a:lnSpc>
+              <a:buNone/>
+              <a:defRPr sz="975" b="0">
+                <a:solidFill>
+                  <a:srgbClr val="8792A6"/>
                 </a:solidFill>
                 <a:latin typeface="Consolas"/>
                 <a:ea typeface="Consolas"/>
@@ -7860,105 +7742,26 @@
               </a:defRPr>
             </a:pPr>
             <a:r>
-              <a:rPr b="0">
-                <a:solidFill>
-                  <a:srgbClr val="263044"/>
-                </a:solidFill>
-              </a:rPr>
-              <a:t>    </a:t>
-            </a:r>
-            <a:r>
-              <a:rPr b="1">
-                <a:solidFill>
-                  <a:srgbClr val="0969C3"/>
-                </a:solidFill>
-              </a:rPr>
-              <a:t>var</a:t>
-            </a:r>
-            <a:r>
-              <a:rPr b="0">
-                <a:solidFill>
-                  <a:srgbClr val="263044"/>
-                </a:solidFill>
-              </a:rPr>
-              <a:t> story = events</a:t>
-            </a:r>
-          </a:p>
-          <a:p xmlns:a="http://schemas.openxmlformats.org/drawingml/2006/main">
-            <a:pPr>
-              <a:buNone/>
-              <a:defRPr sz="1050">
-                <a:solidFill>
-                  <a:srgbClr val="263044"/>
+              <a:rPr sz="975" b="0">
+                <a:solidFill>
+                  <a:srgbClr val="8792A6"/>
                 </a:solidFill>
                 <a:latin typeface="Consolas"/>
                 <a:ea typeface="Consolas"/>
                 <a:cs typeface="Consolas"/>
-              </a:defRPr>
-            </a:pPr>
-            <a:r>
-              <a:rPr b="0">
-                <a:solidFill>
-                  <a:srgbClr val="263044"/>
-                </a:solidFill>
-              </a:rPr>
-              <a:t>        .</a:t>
-            </a:r>
-            <a:r>
-              <a:rPr b="0">
-                <a:solidFill>
-                  <a:srgbClr val="7651D4"/>
-                </a:solidFill>
-              </a:rPr>
-              <a:t>Where</a:t>
-            </a:r>
-            <a:r>
-              <a:rPr b="0">
-                <a:solidFill>
-                  <a:srgbClr val="263044"/>
-                </a:solidFill>
-              </a:rPr>
-              <a:t>(e =&gt; e.</a:t>
-            </a:r>
-            <a:r>
-              <a:rPr b="0">
-                <a:solidFill>
-                  <a:srgbClr val="7651D4"/>
-                </a:solidFill>
-              </a:rPr>
-              <a:t>CorrelationId</a:t>
-            </a:r>
-            <a:r>
-              <a:rPr b="0">
-                <a:solidFill>
-                  <a:srgbClr val="263044"/>
-                </a:solidFill>
-              </a:rPr>
-              <a:t> != </a:t>
-            </a:r>
-            <a:r>
-              <a:rPr b="1">
-                <a:solidFill>
-                  <a:srgbClr val="0969C3"/>
-                </a:solidFill>
-              </a:rPr>
-              <a:t>null</a:t>
-            </a:r>
-            <a:r>
-              <a:rPr b="0">
-                <a:solidFill>
-                  <a:srgbClr val="263044"/>
-                </a:solidFill>
-              </a:rPr>
-              <a:t>)</a:t>
-            </a:r>
-          </a:p>
-          <a:p xmlns:a="http://schemas.openxmlformats.org/drawingml/2006/main">
-            <a:pPr>
-              <a:buNone/>
-              <a:defRPr sz="1050">
-                <a:solidFill>
-                  <a:srgbClr val="263044"/>
+              </a:rPr>
+              <a:t>11</a:t>
+            </a:r>
+          </a:p>
+          <a:p xmlns:a="http://schemas.openxmlformats.org/drawingml/2006/main">
+            <a:pPr algn="r">
+              <a:lnSpc>
+                <a:spcPts val="1300"/>
+              </a:lnSpc>
+              <a:buNone/>
+              <a:defRPr sz="975" b="0">
+                <a:solidFill>
+                  <a:srgbClr val="8792A6"/>
                 </a:solidFill>
                 <a:latin typeface="Consolas"/>
                 <a:ea typeface="Consolas"/>
@@ -7966,101 +7769,56 @@
               </a:defRPr>
             </a:pPr>
             <a:r>
-              <a:rPr b="0">
-                <a:solidFill>
-                  <a:srgbClr val="263044"/>
-                </a:solidFill>
-              </a:rPr>
-              <a:t>        .</a:t>
-            </a:r>
-            <a:r>
-              <a:rPr b="0">
-                <a:solidFill>
-                  <a:srgbClr val="7651D4"/>
-                </a:solidFill>
-              </a:rPr>
-              <a:t>GroupBy</a:t>
-            </a:r>
-            <a:r>
-              <a:rPr b="0">
-                <a:solidFill>
-                  <a:srgbClr val="263044"/>
-                </a:solidFill>
-              </a:rPr>
-              <a:t>(e =&gt; e.</a:t>
-            </a:r>
-            <a:r>
-              <a:rPr b="0">
-                <a:solidFill>
-                  <a:srgbClr val="7651D4"/>
-                </a:solidFill>
-              </a:rPr>
-              <a:t>CorrelationId</a:t>
-            </a:r>
-            <a:r>
-              <a:rPr b="0">
-                <a:solidFill>
-                  <a:srgbClr val="263044"/>
-                </a:solidFill>
-              </a:rPr>
-              <a:t>)</a:t>
-            </a:r>
-          </a:p>
-          <a:p xmlns:a="http://schemas.openxmlformats.org/drawingml/2006/main">
-            <a:pPr>
-              <a:buNone/>
-              <a:defRPr sz="1050">
-                <a:solidFill>
-                  <a:srgbClr val="263044"/>
+              <a:rPr sz="975" b="0">
+                <a:solidFill>
+                  <a:srgbClr val="8792A6"/>
                 </a:solidFill>
                 <a:latin typeface="Consolas"/>
                 <a:ea typeface="Consolas"/>
                 <a:cs typeface="Consolas"/>
-              </a:defRPr>
-            </a:pPr>
-            <a:r>
-              <a:rPr b="0">
-                <a:solidFill>
-                  <a:srgbClr val="263044"/>
-                </a:solidFill>
-              </a:rPr>
-              <a:t>        .</a:t>
-            </a:r>
-            <a:r>
-              <a:rPr b="0">
-                <a:solidFill>
-                  <a:srgbClr val="7651D4"/>
-                </a:solidFill>
-              </a:rPr>
-              <a:t>Select</a:t>
-            </a:r>
-            <a:r>
-              <a:rPr b="0">
-                <a:solidFill>
-                  <a:srgbClr val="263044"/>
-                </a:solidFill>
-              </a:rPr>
-              <a:t>(group =&gt; timeline.</a:t>
-            </a:r>
-            <a:r>
-              <a:rPr b="0">
-                <a:solidFill>
-                  <a:srgbClr val="7651D4"/>
-                </a:solidFill>
-              </a:rPr>
-              <a:t>Build</a:t>
-            </a:r>
-            <a:r>
-              <a:rPr b="0">
-                <a:solidFill>
-                  <a:srgbClr val="263044"/>
-                </a:solidFill>
-              </a:rPr>
-              <a:t>(group));</a:t>
-            </a:r>
-          </a:p>
+              </a:rPr>
+              <a:t>12</a:t>
+            </a:r>
+          </a:p>
+        </p:txBody>
+      </p:sp>
+      <p:sp>
+        <p:nvSpPr>
+          <p:cNvPr id="12" name="Rectangle 11">
+            <a:extLst xmlns:a="http://schemas.openxmlformats.org/drawingml/2006/main">
+              <a:ext uri="{FF2B5EF4-FFF2-40B4-BE49-F238E27FC236}">
+                <a16:creationId xmlns:a16="http://schemas.microsoft.com/office/drawing/2014/main" id="{4D46582C-A5A4-4CB7-A21B-E1F5D3852278}"/>
+              </a:ext>
+            </a:extLst>
+          </p:cNvPr>
+          <p:cNvSpPr>
+            <a:spLocks xmlns:a="http://schemas.openxmlformats.org/drawingml/2006/main" noGrp="1"/>
+          </p:cNvSpPr>
+          <p:nvPr/>
+        </p:nvSpPr>
+        <p:spPr>
+          <a:xfrm xmlns:a="http://schemas.openxmlformats.org/drawingml/2006/main">
+            <a:off x="1200150" y="2571750"/>
+            <a:ext cx="6153150" cy="3028950"/>
+          </a:xfrm>
+          <a:prstGeom xmlns:a="http://schemas.openxmlformats.org/drawingml/2006/main" prst="rect">
+            <a:avLst/>
+          </a:prstGeom>
+          <a:noFill xmlns:a="http://schemas.openxmlformats.org/drawingml/2006/main"/>
+          <a:ln xmlns:a="http://schemas.openxmlformats.org/drawingml/2006/main" w="0">
+            <a:noFill/>
+          </a:ln>
+        </p:spPr>
+        <p:txBody>
+          <a:bodyPr xmlns:a="http://schemas.openxmlformats.org/drawingml/2006/main" wrap="square" lIns="0" tIns="0" rIns="0" bIns="0" anchor="t">
+            <a:normAutofit/>
+          </a:bodyPr>
+          <a:lstStyle xmlns:a="http://schemas.openxmlformats.org/drawingml/2006/main"/>
           <a:p xmlns:a="http://schemas.openxmlformats.org/drawingml/2006/main">
             <a:pPr>
+              <a:lnSpc>
+                <a:spcPts val="1300"/>
+              </a:lnSpc>
               <a:buNone/>
               <a:defRPr sz="1050">
                 <a:solidFill>
@@ -8072,28 +7830,36 @@
               </a:defRPr>
             </a:pPr>
             <a:r>
+              <a:rPr b="1">
+                <a:solidFill>
+                  <a:srgbClr val="0969C3"/>
+                </a:solidFill>
+              </a:rPr>
+              <a:t>public</a:t>
+            </a:r>
+            <a:r>
               <a:rPr b="0">
                 <a:solidFill>
                   <a:srgbClr val="263044"/>
                 </a:solidFill>
               </a:rPr>
-              <a:t>    </a:t>
-            </a:r>
-            <a:r>
-              <a:rPr b="1">
-                <a:solidFill>
-                  <a:srgbClr val="0969C3"/>
-                </a:solidFill>
-              </a:rPr>
-              <a:t>return</a:t>
+              <a:t> </a:t>
             </a:r>
             <a:r>
               <a:rPr b="0">
                 <a:solidFill>
+                  <a:srgbClr val="7651D4"/>
+                </a:solidFill>
+              </a:rPr>
+              <a:t>IReadOnlyList</a:t>
+            </a:r>
+            <a:r>
+              <a:rPr b="0">
+                <a:solidFill>
                   <a:srgbClr val="263044"/>
                 </a:solidFill>
               </a:rPr>
-              <a:t> detector.</a:t>
+              <a:t>&lt;</a:t>
             </a:r>
             <a:r>
               <a:rPr b="0">
@@ -8101,7 +7867,7 @@
                   <a:srgbClr val="7651D4"/>
                 </a:solidFill>
               </a:rPr>
-              <a:t>FindRiskPattern</a:t>
+              <a:t>CorrelationCase</a:t>
             </a:r>
             <a:r>
               <a:rPr b="0">
@@ -8109,11 +7875,30 @@
                   <a:srgbClr val="263044"/>
                 </a:solidFill>
               </a:rPr>
-              <a:t>(story)</a:t>
+              <a:t>&gt; </a:t>
+            </a:r>
+            <a:r>
+              <a:rPr b="0">
+                <a:solidFill>
+                  <a:srgbClr val="7651D4"/>
+                </a:solidFill>
+              </a:rPr>
+              <a:t>Correlate</a:t>
+            </a:r>
+            <a:r>
+              <a:rPr b="0">
+                <a:solidFill>
+                  <a:srgbClr val="263044"/>
+                </a:solidFill>
+              </a:rPr>
+              <a:t>(</a:t>
             </a:r>
           </a:p>
           <a:p xmlns:a="http://schemas.openxmlformats.org/drawingml/2006/main">
             <a:pPr>
+              <a:lnSpc>
+                <a:spcPts val="1300"/>
+              </a:lnSpc>
               <a:buNone/>
               <a:defRPr sz="1050">
                 <a:solidFill>
@@ -8130,7 +7915,7 @@
                   <a:srgbClr val="263044"/>
                 </a:solidFill>
               </a:rPr>
-              <a:t>        ?? </a:t>
+              <a:t>    </a:t>
             </a:r>
             <a:r>
               <a:rPr b="0">
@@ -8138,7 +7923,7 @@
                   <a:srgbClr val="7651D4"/>
                 </a:solidFill>
               </a:rPr>
-              <a:t>Finding</a:t>
+              <a:t>IEnumerable</a:t>
             </a:r>
             <a:r>
               <a:rPr b="0">
@@ -8146,6 +7931,406 @@
                   <a:srgbClr val="263044"/>
                 </a:solidFill>
               </a:rPr>
+              <a:t>&lt;</a:t>
+            </a:r>
+            <a:r>
+              <a:rPr b="0">
+                <a:solidFill>
+                  <a:srgbClr val="7651D4"/>
+                </a:solidFill>
+              </a:rPr>
+              <a:t>SecurityEvent</a:t>
+            </a:r>
+            <a:r>
+              <a:rPr b="0">
+                <a:solidFill>
+                  <a:srgbClr val="263044"/>
+                </a:solidFill>
+              </a:rPr>
+              <a:t>&gt; events)</a:t>
+            </a:r>
+          </a:p>
+          <a:p xmlns:a="http://schemas.openxmlformats.org/drawingml/2006/main">
+            <a:pPr>
+              <a:lnSpc>
+                <a:spcPts val="1300"/>
+              </a:lnSpc>
+              <a:buNone/>
+              <a:defRPr sz="1050">
+                <a:solidFill>
+                  <a:srgbClr val="263044"/>
+                </a:solidFill>
+                <a:latin typeface="Consolas"/>
+                <a:ea typeface="Consolas"/>
+                <a:cs typeface="Consolas"/>
+              </a:defRPr>
+            </a:pPr>
+            <a:r>
+              <a:rPr b="0">
+                <a:solidFill>
+                  <a:srgbClr val="263044"/>
+                </a:solidFill>
+              </a:rPr>
+              <a:t>{</a:t>
+            </a:r>
+          </a:p>
+          <a:p xmlns:a="http://schemas.openxmlformats.org/drawingml/2006/main">
+            <a:pPr>
+              <a:lnSpc>
+                <a:spcPts val="1300"/>
+              </a:lnSpc>
+              <a:buNone/>
+              <a:defRPr sz="1050">
+                <a:solidFill>
+                  <a:srgbClr val="263044"/>
+                </a:solidFill>
+                <a:latin typeface="Consolas"/>
+                <a:ea typeface="Consolas"/>
+                <a:cs typeface="Consolas"/>
+              </a:defRPr>
+            </a:pPr>
+            <a:r>
+              <a:rPr b="0">
+                <a:solidFill>
+                  <a:srgbClr val="263044"/>
+                </a:solidFill>
+              </a:rPr>
+              <a:t>    </a:t>
+            </a:r>
+            <a:r>
+              <a:rPr b="1">
+                <a:solidFill>
+                  <a:srgbClr val="0969C3"/>
+                </a:solidFill>
+              </a:rPr>
+              <a:t>return</a:t>
+            </a:r>
+            <a:r>
+              <a:rPr b="0">
+                <a:solidFill>
+                  <a:srgbClr val="263044"/>
+                </a:solidFill>
+              </a:rPr>
+              <a:t> events</a:t>
+            </a:r>
+          </a:p>
+          <a:p xmlns:a="http://schemas.openxmlformats.org/drawingml/2006/main">
+            <a:pPr>
+              <a:lnSpc>
+                <a:spcPts val="1300"/>
+              </a:lnSpc>
+              <a:buNone/>
+              <a:defRPr sz="1050">
+                <a:solidFill>
+                  <a:srgbClr val="263044"/>
+                </a:solidFill>
+                <a:latin typeface="Consolas"/>
+                <a:ea typeface="Consolas"/>
+                <a:cs typeface="Consolas"/>
+              </a:defRPr>
+            </a:pPr>
+            <a:r>
+              <a:rPr b="0">
+                <a:solidFill>
+                  <a:srgbClr val="263044"/>
+                </a:solidFill>
+              </a:rPr>
+              <a:t>        .</a:t>
+            </a:r>
+            <a:r>
+              <a:rPr b="0">
+                <a:solidFill>
+                  <a:srgbClr val="7651D4"/>
+                </a:solidFill>
+              </a:rPr>
+              <a:t>GroupBy</a:t>
+            </a:r>
+            <a:r>
+              <a:rPr b="0">
+                <a:solidFill>
+                  <a:srgbClr val="263044"/>
+                </a:solidFill>
+              </a:rPr>
+              <a:t>(securityEvent =&gt; securityEvent.</a:t>
+            </a:r>
+            <a:r>
+              <a:rPr b="0">
+                <a:solidFill>
+                  <a:srgbClr val="7651D4"/>
+                </a:solidFill>
+              </a:rPr>
+              <a:t>CorrelationId</a:t>
+            </a:r>
+            <a:r>
+              <a:rPr b="0">
+                <a:solidFill>
+                  <a:srgbClr val="263044"/>
+                </a:solidFill>
+              </a:rPr>
+              <a:t>)</a:t>
+            </a:r>
+          </a:p>
+          <a:p xmlns:a="http://schemas.openxmlformats.org/drawingml/2006/main">
+            <a:pPr>
+              <a:lnSpc>
+                <a:spcPts val="1300"/>
+              </a:lnSpc>
+              <a:buNone/>
+              <a:defRPr sz="1050">
+                <a:solidFill>
+                  <a:srgbClr val="263044"/>
+                </a:solidFill>
+                <a:latin typeface="Consolas"/>
+                <a:ea typeface="Consolas"/>
+                <a:cs typeface="Consolas"/>
+              </a:defRPr>
+            </a:pPr>
+            <a:r>
+              <a:rPr b="0">
+                <a:solidFill>
+                  <a:srgbClr val="263044"/>
+                </a:solidFill>
+              </a:rPr>
+              <a:t>        .</a:t>
+            </a:r>
+            <a:r>
+              <a:rPr b="0">
+                <a:solidFill>
+                  <a:srgbClr val="7651D4"/>
+                </a:solidFill>
+              </a:rPr>
+              <a:t>Select</a:t>
+            </a:r>
+            <a:r>
+              <a:rPr b="0">
+                <a:solidFill>
+                  <a:srgbClr val="263044"/>
+                </a:solidFill>
+              </a:rPr>
+              <a:t>(group =&gt; </a:t>
+            </a:r>
+            <a:r>
+              <a:rPr b="1">
+                <a:solidFill>
+                  <a:srgbClr val="0969C3"/>
+                </a:solidFill>
+              </a:rPr>
+              <a:t>new</a:t>
+            </a:r>
+            <a:r>
+              <a:rPr b="0">
+                <a:solidFill>
+                  <a:srgbClr val="263044"/>
+                </a:solidFill>
+              </a:rPr>
+              <a:t> </a:t>
+            </a:r>
+            <a:r>
+              <a:rPr b="0">
+                <a:solidFill>
+                  <a:srgbClr val="7651D4"/>
+                </a:solidFill>
+              </a:rPr>
+              <a:t>CorrelationCase</a:t>
+            </a:r>
+            <a:r>
+              <a:rPr b="0">
+                <a:solidFill>
+                  <a:srgbClr val="263044"/>
+                </a:solidFill>
+              </a:rPr>
+              <a:t>(</a:t>
+            </a:r>
+          </a:p>
+          <a:p xmlns:a="http://schemas.openxmlformats.org/drawingml/2006/main">
+            <a:pPr>
+              <a:lnSpc>
+                <a:spcPts val="1300"/>
+              </a:lnSpc>
+              <a:buNone/>
+              <a:defRPr sz="1050">
+                <a:solidFill>
+                  <a:srgbClr val="263044"/>
+                </a:solidFill>
+                <a:latin typeface="Consolas"/>
+                <a:ea typeface="Consolas"/>
+                <a:cs typeface="Consolas"/>
+              </a:defRPr>
+            </a:pPr>
+            <a:r>
+              <a:rPr b="0">
+                <a:solidFill>
+                  <a:srgbClr val="263044"/>
+                </a:solidFill>
+              </a:rPr>
+              <a:t>            group.</a:t>
+            </a:r>
+            <a:r>
+              <a:rPr b="0">
+                <a:solidFill>
+                  <a:srgbClr val="7651D4"/>
+                </a:solidFill>
+              </a:rPr>
+              <a:t>Key</a:t>
+            </a:r>
+            <a:r>
+              <a:rPr b="0">
+                <a:solidFill>
+                  <a:srgbClr val="263044"/>
+                </a:solidFill>
+              </a:rPr>
+              <a:t>,</a:t>
+            </a:r>
+          </a:p>
+          <a:p xmlns:a="http://schemas.openxmlformats.org/drawingml/2006/main">
+            <a:pPr>
+              <a:lnSpc>
+                <a:spcPts val="1300"/>
+              </a:lnSpc>
+              <a:buNone/>
+              <a:defRPr sz="1050">
+                <a:solidFill>
+                  <a:srgbClr val="263044"/>
+                </a:solidFill>
+                <a:latin typeface="Consolas"/>
+                <a:ea typeface="Consolas"/>
+                <a:cs typeface="Consolas"/>
+              </a:defRPr>
+            </a:pPr>
+            <a:r>
+              <a:rPr b="0">
+                <a:solidFill>
+                  <a:srgbClr val="263044"/>
+                </a:solidFill>
+              </a:rPr>
+              <a:t>            group.</a:t>
+            </a:r>
+            <a:r>
+              <a:rPr b="0">
+                <a:solidFill>
+                  <a:srgbClr val="7651D4"/>
+                </a:solidFill>
+              </a:rPr>
+              <a:t>Count</a:t>
+            </a:r>
+            <a:r>
+              <a:rPr b="0">
+                <a:solidFill>
+                  <a:srgbClr val="263044"/>
+                </a:solidFill>
+              </a:rPr>
+              <a:t>(),</a:t>
+            </a:r>
+          </a:p>
+          <a:p xmlns:a="http://schemas.openxmlformats.org/drawingml/2006/main">
+            <a:pPr>
+              <a:lnSpc>
+                <a:spcPts val="1300"/>
+              </a:lnSpc>
+              <a:buNone/>
+              <a:defRPr sz="1050">
+                <a:solidFill>
+                  <a:srgbClr val="263044"/>
+                </a:solidFill>
+                <a:latin typeface="Consolas"/>
+                <a:ea typeface="Consolas"/>
+                <a:cs typeface="Consolas"/>
+              </a:defRPr>
+            </a:pPr>
+            <a:r>
+              <a:rPr b="0">
+                <a:solidFill>
+                  <a:srgbClr val="263044"/>
+                </a:solidFill>
+              </a:rPr>
+              <a:t>            group.</a:t>
+            </a:r>
+            <a:r>
+              <a:rPr b="0">
+                <a:solidFill>
+                  <a:srgbClr val="7651D4"/>
+                </a:solidFill>
+              </a:rPr>
+              <a:t>Select</a:t>
+            </a:r>
+            <a:r>
+              <a:rPr b="0">
+                <a:solidFill>
+                  <a:srgbClr val="263044"/>
+                </a:solidFill>
+              </a:rPr>
+              <a:t>(securityEvent =&gt; securityEvent.</a:t>
+            </a:r>
+            <a:r>
+              <a:rPr b="0">
+                <a:solidFill>
+                  <a:srgbClr val="7651D4"/>
+                </a:solidFill>
+              </a:rPr>
+              <a:t>Type</a:t>
+            </a:r>
+            <a:r>
+              <a:rPr b="0">
+                <a:solidFill>
+                  <a:srgbClr val="263044"/>
+                </a:solidFill>
+              </a:rPr>
+              <a:t>)</a:t>
+            </a:r>
+          </a:p>
+          <a:p xmlns:a="http://schemas.openxmlformats.org/drawingml/2006/main">
+            <a:pPr>
+              <a:lnSpc>
+                <a:spcPts val="1300"/>
+              </a:lnSpc>
+              <a:buNone/>
+              <a:defRPr sz="1050">
+                <a:solidFill>
+                  <a:srgbClr val="263044"/>
+                </a:solidFill>
+                <a:latin typeface="Consolas"/>
+                <a:ea typeface="Consolas"/>
+                <a:cs typeface="Consolas"/>
+              </a:defRPr>
+            </a:pPr>
+            <a:r>
+              <a:rPr b="0">
+                <a:solidFill>
+                  <a:srgbClr val="263044"/>
+                </a:solidFill>
+              </a:rPr>
+              <a:t>                .</a:t>
+            </a:r>
+            <a:r>
+              <a:rPr b="0">
+                <a:solidFill>
+                  <a:srgbClr val="7651D4"/>
+                </a:solidFill>
+              </a:rPr>
+              <a:t>ToHashSet</a:t>
+            </a:r>
+            <a:r>
+              <a:rPr b="0">
+                <a:solidFill>
+                  <a:srgbClr val="263044"/>
+                </a:solidFill>
+              </a:rPr>
+              <a:t>(</a:t>
+            </a:r>
+            <a:r>
+              <a:rPr b="0">
+                <a:solidFill>
+                  <a:srgbClr val="7651D4"/>
+                </a:solidFill>
+              </a:rPr>
+              <a:t>StringComparer</a:t>
+            </a:r>
+            <a:r>
+              <a:rPr b="0">
+                <a:solidFill>
+                  <a:srgbClr val="263044"/>
+                </a:solidFill>
+              </a:rPr>
               <a:t>.</a:t>
             </a:r>
             <a:r>
@@ -8154,7 +8339,7 @@
                   <a:srgbClr val="7651D4"/>
                 </a:solidFill>
               </a:rPr>
-              <a:t>None</a:t>
+              <a:t>OrdinalIgnoreCase</a:t>
             </a:r>
             <a:r>
               <a:rPr b="0">
@@ -8162,27 +8347,54 @@
                   <a:srgbClr val="263044"/>
                 </a:solidFill>
               </a:rPr>
-              <a:t>(</a:t>
-            </a:r>
+              <a:t>)))</a:t>
+            </a:r>
+          </a:p>
+          <a:p xmlns:a="http://schemas.openxmlformats.org/drawingml/2006/main">
+            <a:pPr>
+              <a:lnSpc>
+                <a:spcPts val="1300"/>
+              </a:lnSpc>
+              <a:buNone/>
+              <a:defRPr sz="1050">
+                <a:solidFill>
+                  <a:srgbClr val="263044"/>
+                </a:solidFill>
+                <a:latin typeface="Consolas"/>
+                <a:ea typeface="Consolas"/>
+                <a:cs typeface="Consolas"/>
+              </a:defRPr>
+            </a:pPr>
             <a:r>
               <a:rPr b="0">
                 <a:solidFill>
-                  <a:srgbClr val="B45309"/>
-                </a:solidFill>
-              </a:rPr>
-              <a:t>"insufficient_context"</a:t>
+                  <a:srgbClr val="263044"/>
+                </a:solidFill>
+              </a:rPr>
+              <a:t>        .</a:t>
             </a:r>
             <a:r>
               <a:rPr b="0">
                 <a:solidFill>
+                  <a:srgbClr val="7651D4"/>
+                </a:solidFill>
+              </a:rPr>
+              <a:t>ToArray</a:t>
+            </a:r>
+            <a:r>
+              <a:rPr b="0">
+                <a:solidFill>
                   <a:srgbClr val="263044"/>
                 </a:solidFill>
               </a:rPr>
-              <a:t>);</a:t>
+              <a:t>();</a:t>
             </a:r>
           </a:p>
           <a:p xmlns:a="http://schemas.openxmlformats.org/drawingml/2006/main">
             <a:pPr>
+              <a:lnSpc>
+                <a:spcPts val="1300"/>
+              </a:lnSpc>
               <a:buNone/>
               <a:defRPr sz="1050">
                 <a:solidFill>
@@ -8356,7 +8568,7 @@
                 <a:ea typeface="Aptos"/>
                 <a:cs typeface="Aptos"/>
               </a:rPr>
-              <a:t>Време, актер, ресурс и correlation ID повезују догађаје у образац који може да се објасни.</a:t>
+              <a:t>Correlation ID повезује појединачне догађаје у случај са бројем догађаја и скупом типова.</a:t>
             </a:r>
           </a:p>
         </p:txBody>
@@ -8758,7 +8970,7 @@
                 <a:ea typeface="Aptos Display"/>
                 <a:cs typeface="Aptos Display"/>
               </a:rPr>
-              <a:t>Стар доказ не сме да изгледа као актуелна сигурност</a:t>
+              <a:t>Контрола без мерења не важи као ефективна</a:t>
             </a:r>
           </a:p>
         </p:txBody>
@@ -8819,7 +9031,7 @@
                 <a:ea typeface="Aptos"/>
                 <a:cs typeface="Aptos"/>
               </a:rPr>
-              <a:t>Тест показује да застарео доказ не може подржати процену ефективности контроле.</a:t>
+              <a:t>Тест показује да контрола која никада није била на проби не добија оцену да ради.</a:t>
             </a:r>
           </a:p>
         </p:txBody>
@@ -8841,7 +9053,7 @@
         <p:spPr>
           <a:xfrm xmlns:a="http://schemas.openxmlformats.org/drawingml/2006/main">
             <a:off x="666750" y="2095500"/>
-            <a:ext cx="6858000" cy="2276475"/>
+            <a:ext cx="6858000" cy="2647450"/>
           </a:xfrm>
           <a:prstGeom xmlns:a="http://schemas.openxmlformats.org/drawingml/2006/main" prst="roundRect">
             <a:avLst>
@@ -9023,7 +9235,7 @@
           <a:p xmlns:a="http://schemas.openxmlformats.org/drawingml/2006/main">
             <a:pPr algn="r">
               <a:lnSpc>
-                <a:spcPct val="100000"/>
+                <a:spcPts val="1300"/>
               </a:lnSpc>
               <a:buNone/>
               <a:defRPr sz="975" b="0">
@@ -9050,7 +9262,7 @@
           <a:p xmlns:a="http://schemas.openxmlformats.org/drawingml/2006/main">
             <a:pPr algn="r">
               <a:lnSpc>
-                <a:spcPct val="100000"/>
+                <a:spcPts val="1300"/>
               </a:lnSpc>
               <a:buNone/>
               <a:defRPr sz="975" b="0">
@@ -9077,7 +9289,7 @@
           <a:p xmlns:a="http://schemas.openxmlformats.org/drawingml/2006/main">
             <a:pPr algn="r">
               <a:lnSpc>
-                <a:spcPct val="100000"/>
+                <a:spcPts val="1300"/>
               </a:lnSpc>
               <a:buNone/>
               <a:defRPr sz="975" b="0">
@@ -9104,7 +9316,7 @@
           <a:p xmlns:a="http://schemas.openxmlformats.org/drawingml/2006/main">
             <a:pPr algn="r">
               <a:lnSpc>
-                <a:spcPct val="100000"/>
+                <a:spcPts val="1300"/>
               </a:lnSpc>
               <a:buNone/>
               <a:defRPr sz="975" b="0">
@@ -9131,7 +9343,7 @@
           <a:p xmlns:a="http://schemas.openxmlformats.org/drawingml/2006/main">
             <a:pPr algn="r">
               <a:lnSpc>
-                <a:spcPct val="100000"/>
+                <a:spcPts val="1300"/>
               </a:lnSpc>
               <a:buNone/>
               <a:defRPr sz="975" b="0">
@@ -9158,7 +9370,7 @@
           <a:p xmlns:a="http://schemas.openxmlformats.org/drawingml/2006/main">
             <a:pPr algn="r">
               <a:lnSpc>
-                <a:spcPct val="100000"/>
+                <a:spcPts val="1300"/>
               </a:lnSpc>
               <a:buNone/>
               <a:defRPr sz="975" b="0">
@@ -9185,7 +9397,7 @@
           <a:p xmlns:a="http://schemas.openxmlformats.org/drawingml/2006/main">
             <a:pPr algn="r">
               <a:lnSpc>
-                <a:spcPct val="100000"/>
+                <a:spcPts val="1300"/>
               </a:lnSpc>
               <a:buNone/>
               <a:defRPr sz="975" b="0">
@@ -9212,7 +9424,7 @@
           <a:p xmlns:a="http://schemas.openxmlformats.org/drawingml/2006/main">
             <a:pPr algn="r">
               <a:lnSpc>
-                <a:spcPct val="100000"/>
+                <a:spcPts val="1300"/>
               </a:lnSpc>
               <a:buNone/>
               <a:defRPr sz="975" b="0">
@@ -9239,7 +9451,7 @@
           <a:p xmlns:a="http://schemas.openxmlformats.org/drawingml/2006/main">
             <a:pPr algn="r">
               <a:lnSpc>
-                <a:spcPct val="100000"/>
+                <a:spcPts val="1300"/>
               </a:lnSpc>
               <a:buNone/>
               <a:defRPr sz="975" b="0">
@@ -9266,7 +9478,7 @@
           <a:p xmlns:a="http://schemas.openxmlformats.org/drawingml/2006/main">
             <a:pPr algn="r">
               <a:lnSpc>
-                <a:spcPct val="100000"/>
+                <a:spcPts val="1300"/>
               </a:lnSpc>
               <a:buNone/>
               <a:defRPr sz="975" b="0">
@@ -9290,46 +9502,15 @@
               <a:t>10</a:t>
             </a:r>
           </a:p>
-        </p:txBody>
-      </p:sp>
-      <p:sp>
-        <p:nvSpPr>
-          <p:cNvPr id="12" name="Rectangle 11">
-            <a:extLst xmlns:a="http://schemas.openxmlformats.org/drawingml/2006/main">
-              <a:ext uri="{FF2B5EF4-FFF2-40B4-BE49-F238E27FC236}">
-                <a16:creationId xmlns:a16="http://schemas.microsoft.com/office/drawing/2014/main" id="{E696EA46-F66B-4FFB-879D-9DC927735B9B}"/>
-              </a:ext>
-            </a:extLst>
-          </p:cNvPr>
-          <p:cNvSpPr>
-            <a:spLocks xmlns:a="http://schemas.openxmlformats.org/drawingml/2006/main" noGrp="1"/>
-          </p:cNvSpPr>
-          <p:nvPr/>
-        </p:nvSpPr>
-        <p:spPr>
-          <a:xfrm xmlns:a="http://schemas.openxmlformats.org/drawingml/2006/main">
-            <a:off x="1200150" y="2571750"/>
-            <a:ext cx="6153150" cy="3028950"/>
-          </a:xfrm>
-          <a:prstGeom xmlns:a="http://schemas.openxmlformats.org/drawingml/2006/main" prst="rect">
-            <a:avLst/>
-          </a:prstGeom>
-          <a:noFill xmlns:a="http://schemas.openxmlformats.org/drawingml/2006/main"/>
-          <a:ln xmlns:a="http://schemas.openxmlformats.org/drawingml/2006/main" w="0">
-            <a:noFill/>
-          </a:ln>
-        </p:spPr>
-        <p:txBody>
-          <a:bodyPr xmlns:a="http://schemas.openxmlformats.org/drawingml/2006/main" wrap="square" lIns="0" tIns="0" rIns="0" bIns="0" anchor="t">
-            <a:normAutofit/>
-          </a:bodyPr>
-          <a:lstStyle xmlns:a="http://schemas.openxmlformats.org/drawingml/2006/main"/>
-          <a:p xmlns:a="http://schemas.openxmlformats.org/drawingml/2006/main">
-            <a:pPr>
-              <a:buNone/>
-              <a:defRPr sz="1050">
-                <a:solidFill>
-                  <a:srgbClr val="263044"/>
+          <a:p xmlns:a="http://schemas.openxmlformats.org/drawingml/2006/main">
+            <a:pPr algn="r">
+              <a:lnSpc>
+                <a:spcPts val="1300"/>
+              </a:lnSpc>
+              <a:buNone/>
+              <a:defRPr sz="975" b="0">
+                <a:solidFill>
+                  <a:srgbClr val="8792A6"/>
                 </a:solidFill>
                 <a:latin typeface="Consolas"/>
                 <a:ea typeface="Consolas"/>
@@ -9337,97 +9518,26 @@
               </a:defRPr>
             </a:pPr>
             <a:r>
-              <a:rPr b="0">
-                <a:solidFill>
-                  <a:srgbClr val="263044"/>
-                </a:solidFill>
-              </a:rPr>
-              <a:t>[</a:t>
-            </a:r>
-            <a:r>
-              <a:rPr b="0">
-                <a:solidFill>
-                  <a:srgbClr val="7651D4"/>
-                </a:solidFill>
-              </a:rPr>
-              <a:t>Fact</a:t>
-            </a:r>
-            <a:r>
-              <a:rPr b="0">
-                <a:solidFill>
-                  <a:srgbClr val="263044"/>
-                </a:solidFill>
-              </a:rPr>
-              <a:t>]</a:t>
-            </a:r>
-          </a:p>
-          <a:p xmlns:a="http://schemas.openxmlformats.org/drawingml/2006/main">
-            <a:pPr>
-              <a:buNone/>
-              <a:defRPr sz="1050">
-                <a:solidFill>
-                  <a:srgbClr val="263044"/>
+              <a:rPr sz="975" b="0">
+                <a:solidFill>
+                  <a:srgbClr val="8792A6"/>
                 </a:solidFill>
                 <a:latin typeface="Consolas"/>
                 <a:ea typeface="Consolas"/>
                 <a:cs typeface="Consolas"/>
-              </a:defRPr>
-            </a:pPr>
-            <a:r>
-              <a:rPr b="1">
-                <a:solidFill>
-                  <a:srgbClr val="0969C3"/>
-                </a:solidFill>
-              </a:rPr>
-              <a:t>public</a:t>
-            </a:r>
-            <a:r>
-              <a:rPr b="0">
-                <a:solidFill>
-                  <a:srgbClr val="263044"/>
-                </a:solidFill>
-              </a:rPr>
-              <a:t> </a:t>
-            </a:r>
-            <a:r>
-              <a:rPr b="1">
-                <a:solidFill>
-                  <a:srgbClr val="0969C3"/>
-                </a:solidFill>
-              </a:rPr>
-              <a:t>void</a:t>
-            </a:r>
-            <a:r>
-              <a:rPr b="0">
-                <a:solidFill>
-                  <a:srgbClr val="263044"/>
-                </a:solidFill>
-              </a:rPr>
-              <a:t> </a:t>
-            </a:r>
-            <a:r>
-              <a:rPr b="0">
-                <a:solidFill>
-                  <a:srgbClr val="7651D4"/>
-                </a:solidFill>
-              </a:rPr>
-              <a:t>Control_without_fresh_evidence_is_not_effective</a:t>
-            </a:r>
-            <a:r>
-              <a:rPr b="0">
-                <a:solidFill>
-                  <a:srgbClr val="263044"/>
-                </a:solidFill>
-              </a:rPr>
-              <a:t>()</a:t>
-            </a:r>
-          </a:p>
-          <a:p xmlns:a="http://schemas.openxmlformats.org/drawingml/2006/main">
-            <a:pPr>
-              <a:buNone/>
-              <a:defRPr sz="1050">
-                <a:solidFill>
-                  <a:srgbClr val="263044"/>
+              </a:rPr>
+              <a:t>11</a:t>
+            </a:r>
+          </a:p>
+          <a:p xmlns:a="http://schemas.openxmlformats.org/drawingml/2006/main">
+            <a:pPr algn="r">
+              <a:lnSpc>
+                <a:spcPts val="1300"/>
+              </a:lnSpc>
+              <a:buNone/>
+              <a:defRPr sz="975" b="0">
+                <a:solidFill>
+                  <a:srgbClr val="8792A6"/>
                 </a:solidFill>
                 <a:latin typeface="Consolas"/>
                 <a:ea typeface="Consolas"/>
@@ -9435,101 +9545,56 @@
               </a:defRPr>
             </a:pPr>
             <a:r>
-              <a:rPr b="0">
-                <a:solidFill>
-                  <a:srgbClr val="263044"/>
-                </a:solidFill>
-              </a:rPr>
-              <a:t>{</a:t>
-            </a:r>
-          </a:p>
-          <a:p xmlns:a="http://schemas.openxmlformats.org/drawingml/2006/main">
-            <a:pPr>
-              <a:buNone/>
-              <a:defRPr sz="1050">
-                <a:solidFill>
-                  <a:srgbClr val="263044"/>
+              <a:rPr sz="975" b="0">
+                <a:solidFill>
+                  <a:srgbClr val="8792A6"/>
                 </a:solidFill>
                 <a:latin typeface="Consolas"/>
                 <a:ea typeface="Consolas"/>
                 <a:cs typeface="Consolas"/>
-              </a:defRPr>
-            </a:pPr>
-            <a:r>
-              <a:rPr b="0">
-                <a:solidFill>
-                  <a:srgbClr val="263044"/>
-                </a:solidFill>
-              </a:rPr>
-              <a:t>    </a:t>
-            </a:r>
-            <a:r>
-              <a:rPr b="1">
-                <a:solidFill>
-                  <a:srgbClr val="0969C3"/>
-                </a:solidFill>
-              </a:rPr>
-              <a:t>var</a:t>
-            </a:r>
-            <a:r>
-              <a:rPr b="0">
-                <a:solidFill>
-                  <a:srgbClr val="263044"/>
-                </a:solidFill>
-              </a:rPr>
-              <a:t> control = </a:t>
-            </a:r>
-            <a:r>
-              <a:rPr b="0">
-                <a:solidFill>
-                  <a:srgbClr val="7651D4"/>
-                </a:solidFill>
-              </a:rPr>
-              <a:t>Control</a:t>
-            </a:r>
-            <a:r>
-              <a:rPr b="0">
-                <a:solidFill>
-                  <a:srgbClr val="263044"/>
-                </a:solidFill>
-              </a:rPr>
-              <a:t>.</a:t>
-            </a:r>
-            <a:r>
-              <a:rPr b="0">
-                <a:solidFill>
-                  <a:srgbClr val="7651D4"/>
-                </a:solidFill>
-              </a:rPr>
-              <a:t>Tested</a:t>
-            </a:r>
-            <a:r>
-              <a:rPr b="0">
-                <a:solidFill>
-                  <a:srgbClr val="263044"/>
-                </a:solidFill>
-              </a:rPr>
-              <a:t>(monthsAgo: </a:t>
-            </a:r>
-            <a:r>
-              <a:rPr b="0">
-                <a:solidFill>
-                  <a:srgbClr val="B86A09"/>
-                </a:solidFill>
-              </a:rPr>
-              <a:t>8</a:t>
-            </a:r>
-            <a:r>
-              <a:rPr b="0">
-                <a:solidFill>
-                  <a:srgbClr val="263044"/>
-                </a:solidFill>
-              </a:rPr>
-              <a:t>);</a:t>
-            </a:r>
-          </a:p>
+              </a:rPr>
+              <a:t>12</a:t>
+            </a:r>
+          </a:p>
+        </p:txBody>
+      </p:sp>
+      <p:sp>
+        <p:nvSpPr>
+          <p:cNvPr id="12" name="Rectangle 11">
+            <a:extLst xmlns:a="http://schemas.openxmlformats.org/drawingml/2006/main">
+              <a:ext uri="{FF2B5EF4-FFF2-40B4-BE49-F238E27FC236}">
+                <a16:creationId xmlns:a16="http://schemas.microsoft.com/office/drawing/2014/main" id="{E696EA46-F66B-4FFB-879D-9DC927735B9B}"/>
+              </a:ext>
+            </a:extLst>
+          </p:cNvPr>
+          <p:cNvSpPr>
+            <a:spLocks xmlns:a="http://schemas.openxmlformats.org/drawingml/2006/main" noGrp="1"/>
+          </p:cNvSpPr>
+          <p:nvPr/>
+        </p:nvSpPr>
+        <p:spPr>
+          <a:xfrm xmlns:a="http://schemas.openxmlformats.org/drawingml/2006/main">
+            <a:off x="1200150" y="2571750"/>
+            <a:ext cx="6153150" cy="3028950"/>
+          </a:xfrm>
+          <a:prstGeom xmlns:a="http://schemas.openxmlformats.org/drawingml/2006/main" prst="rect">
+            <a:avLst/>
+          </a:prstGeom>
+          <a:noFill xmlns:a="http://schemas.openxmlformats.org/drawingml/2006/main"/>
+          <a:ln xmlns:a="http://schemas.openxmlformats.org/drawingml/2006/main" w="0">
+            <a:noFill/>
+          </a:ln>
+        </p:spPr>
+        <p:txBody>
+          <a:bodyPr xmlns:a="http://schemas.openxmlformats.org/drawingml/2006/main" wrap="square" lIns="0" tIns="0" rIns="0" bIns="0" anchor="t">
+            <a:normAutofit/>
+          </a:bodyPr>
+          <a:lstStyle xmlns:a="http://schemas.openxmlformats.org/drawingml/2006/main"/>
           <a:p xmlns:a="http://schemas.openxmlformats.org/drawingml/2006/main">
             <a:pPr>
+              <a:lnSpc>
+                <a:spcPts val="1300"/>
+              </a:lnSpc>
               <a:buNone/>
               <a:defRPr sz="1050">
                 <a:solidFill>
@@ -9540,14 +9605,36 @@
                 <a:cs typeface="Consolas"/>
               </a:defRPr>
             </a:pPr>
-            <a:endParaRPr b="0">
-              <a:solidFill>
-                <a:srgbClr val="263044"/>
-              </a:solidFill>
-            </a:endParaRPr>
+            <a:r>
+              <a:rPr b="0">
+                <a:solidFill>
+                  <a:srgbClr val="263044"/>
+                </a:solidFill>
+              </a:rPr>
+              <a:t>[</a:t>
+            </a:r>
+            <a:r>
+              <a:rPr b="0">
+                <a:solidFill>
+                  <a:srgbClr val="7651D4"/>
+                </a:solidFill>
+              </a:rPr>
+              <a:t>Test</a:t>
+            </a:r>
+            <a:r>
+              <a:rPr b="0">
+                <a:solidFill>
+                  <a:srgbClr val="263044"/>
+                </a:solidFill>
+              </a:rPr>
+              <a:t>]</a:t>
+            </a:r>
           </a:p>
           <a:p xmlns:a="http://schemas.openxmlformats.org/drawingml/2006/main">
             <a:pPr>
+              <a:lnSpc>
+                <a:spcPts val="1300"/>
+              </a:lnSpc>
               <a:buNone/>
               <a:defRPr sz="1050">
                 <a:solidFill>
@@ -9559,12 +9646,20 @@
               </a:defRPr>
             </a:pPr>
             <a:r>
+              <a:rPr b="1">
+                <a:solidFill>
+                  <a:srgbClr val="0969C3"/>
+                </a:solidFill>
+              </a:rPr>
+              <a:t>public</a:t>
+            </a:r>
+            <a:r>
               <a:rPr b="0">
                 <a:solidFill>
                   <a:srgbClr val="263044"/>
                 </a:solidFill>
               </a:rPr>
-              <a:t>    </a:t>
+              <a:t> </a:t>
             </a:r>
             <a:r>
               <a:rPr b="1">
@@ -9572,7 +9667,7 @@
                   <a:srgbClr val="0969C3"/>
                 </a:solidFill>
               </a:rPr>
-              <a:t>var</a:t>
+              <a:t>void</a:t>
             </a:r>
             <a:r>
               <a:rPr b="0">
@@ -9580,7 +9675,7 @@
                   <a:srgbClr val="263044"/>
                 </a:solidFill>
               </a:rPr>
-              <a:t> score = effectiveness.</a:t>
+              <a:t> </a:t>
             </a:r>
             <a:r>
               <a:rPr b="0">
@@ -9588,7 +9683,7 @@
                   <a:srgbClr val="7651D4"/>
                 </a:solidFill>
               </a:rPr>
-              <a:t>Evaluate</a:t>
+              <a:t>Evaluate_WhenControlWasNeverExercised_DoesNotClaimItWorks</a:t>
             </a:r>
             <a:r>
               <a:rPr b="0">
@@ -9596,27 +9691,14 @@
                   <a:srgbClr val="263044"/>
                 </a:solidFill>
               </a:rPr>
-              <a:t>(control, changedFlow: </a:t>
-            </a:r>
-            <a:r>
-              <a:rPr b="1">
-                <a:solidFill>
-                  <a:srgbClr val="0969C3"/>
-                </a:solidFill>
-              </a:rPr>
-              <a:t>true</a:t>
-            </a:r>
-            <a:r>
-              <a:rPr b="0">
-                <a:solidFill>
-                  <a:srgbClr val="263044"/>
-                </a:solidFill>
-              </a:rPr>
-              <a:t>);</a:t>
+              <a:t>()</a:t>
             </a:r>
           </a:p>
           <a:p xmlns:a="http://schemas.openxmlformats.org/drawingml/2006/main">
             <a:pPr>
+              <a:lnSpc>
+                <a:spcPts val="1300"/>
+              </a:lnSpc>
               <a:buNone/>
               <a:defRPr sz="1050">
                 <a:solidFill>
@@ -9627,14 +9709,20 @@
                 <a:cs typeface="Consolas"/>
               </a:defRPr>
             </a:pPr>
-            <a:endParaRPr b="0">
-              <a:solidFill>
-                <a:srgbClr val="263044"/>
-              </a:solidFill>
-            </a:endParaRPr>
+            <a:r>
+              <a:rPr b="0">
+                <a:solidFill>
+                  <a:srgbClr val="263044"/>
+                </a:solidFill>
+              </a:rPr>
+              <a:t>{</a:t>
+            </a:r>
           </a:p>
           <a:p xmlns:a="http://schemas.openxmlformats.org/drawingml/2006/main">
             <a:pPr>
+              <a:lnSpc>
+                <a:spcPts val="1300"/>
+              </a:lnSpc>
               <a:buNone/>
               <a:defRPr sz="1050">
                 <a:solidFill>
@@ -9651,15 +9739,31 @@
                   <a:srgbClr val="263044"/>
                 </a:solidFill>
               </a:rPr>
-              <a:t>    score.</a:t>
+              <a:t>    </a:t>
+            </a:r>
+            <a:r>
+              <a:rPr b="1">
+                <a:solidFill>
+                  <a:srgbClr val="0969C3"/>
+                </a:solidFill>
+              </a:rPr>
+              <a:t>var</a:t>
             </a:r>
             <a:r>
               <a:rPr b="0">
                 <a:solidFill>
+                  <a:srgbClr val="263044"/>
+                </a:solidFill>
+              </a:rPr>
+              <a:t> effectiveness = _calculator.</a:t>
+            </a:r>
+            <a:r>
+              <a:rPr b="0">
+                <a:solidFill>
                   <a:srgbClr val="7651D4"/>
                 </a:solidFill>
               </a:rPr>
-              <a:t>Status</a:t>
+              <a:t>Evaluate</a:t>
             </a:r>
             <a:r>
               <a:rPr b="0">
@@ -9667,59 +9771,14 @@
                   <a:srgbClr val="263044"/>
                 </a:solidFill>
               </a:rPr>
-              <a:t>.</a:t>
-            </a:r>
-            <a:r>
-              <a:rPr b="0">
-                <a:solidFill>
-                  <a:srgbClr val="7651D4"/>
-                </a:solidFill>
-              </a:rPr>
-              <a:t>Should</a:t>
-            </a:r>
-            <a:r>
-              <a:rPr b="0">
-                <a:solidFill>
-                  <a:srgbClr val="263044"/>
-                </a:solidFill>
-              </a:rPr>
-              <a:t>().</a:t>
-            </a:r>
-            <a:r>
-              <a:rPr b="0">
-                <a:solidFill>
-                  <a:srgbClr val="7651D4"/>
-                </a:solidFill>
-              </a:rPr>
-              <a:t>Be</a:t>
-            </a:r>
-            <a:r>
-              <a:rPr b="0">
-                <a:solidFill>
-                  <a:srgbClr val="263044"/>
-                </a:solidFill>
-              </a:rPr>
               <a:t>(</a:t>
             </a:r>
-            <a:r>
-              <a:rPr b="0">
-                <a:solidFill>
-                  <a:srgbClr val="B45309"/>
-                </a:solidFill>
-              </a:rPr>
-              <a:t>"unknown"</a:t>
-            </a:r>
-            <a:r>
-              <a:rPr b="0">
-                <a:solidFill>
-                  <a:srgbClr val="263044"/>
-                </a:solidFill>
-              </a:rPr>
-              <a:t>);</a:t>
-            </a:r>
           </a:p>
           <a:p xmlns:a="http://schemas.openxmlformats.org/drawingml/2006/main">
             <a:pPr>
+              <a:lnSpc>
+                <a:spcPts val="1300"/>
+              </a:lnSpc>
               <a:buNone/>
               <a:defRPr sz="1050">
                 <a:solidFill>
@@ -9736,15 +9795,31 @@
                   <a:srgbClr val="263044"/>
                 </a:solidFill>
               </a:rPr>
-              <a:t>    score.</a:t>
+              <a:t>        </a:t>
+            </a:r>
+            <a:r>
+              <a:rPr b="1">
+                <a:solidFill>
+                  <a:srgbClr val="0969C3"/>
+                </a:solidFill>
+              </a:rPr>
+              <a:t>new</a:t>
             </a:r>
             <a:r>
               <a:rPr b="0">
                 <a:solidFill>
+                  <a:srgbClr val="263044"/>
+                </a:solidFill>
+              </a:rPr>
+              <a:t> </a:t>
+            </a:r>
+            <a:r>
+              <a:rPr b="0">
+                <a:solidFill>
                   <a:srgbClr val="7651D4"/>
                 </a:solidFill>
               </a:rPr>
-              <a:t>Reason</a:t>
+              <a:t>ControlMeasurement</a:t>
             </a:r>
             <a:r>
               <a:rPr b="0">
@@ -9752,6 +9827,134 @@
                   <a:srgbClr val="263044"/>
                 </a:solidFill>
               </a:rPr>
+              <a:t>(</a:t>
+            </a:r>
+            <a:r>
+              <a:rPr b="0">
+                <a:solidFill>
+                  <a:srgbClr val="B45309"/>
+                </a:solidFill>
+              </a:rPr>
+              <a:t>"step-up"</a:t>
+            </a:r>
+            <a:r>
+              <a:rPr b="0">
+                <a:solidFill>
+                  <a:srgbClr val="263044"/>
+                </a:solidFill>
+              </a:rPr>
+              <a:t>, </a:t>
+            </a:r>
+            <a:r>
+              <a:rPr b="0">
+                <a:solidFill>
+                  <a:srgbClr val="B86A09"/>
+                </a:solidFill>
+              </a:rPr>
+              <a:t>0</a:t>
+            </a:r>
+            <a:r>
+              <a:rPr b="0">
+                <a:solidFill>
+                  <a:srgbClr val="263044"/>
+                </a:solidFill>
+              </a:rPr>
+              <a:t>, </a:t>
+            </a:r>
+            <a:r>
+              <a:rPr b="0">
+                <a:solidFill>
+                  <a:srgbClr val="B86A09"/>
+                </a:solidFill>
+              </a:rPr>
+              <a:t>0</a:t>
+            </a:r>
+            <a:r>
+              <a:rPr b="0">
+                <a:solidFill>
+                  <a:srgbClr val="263044"/>
+                </a:solidFill>
+              </a:rPr>
+              <a:t>));</a:t>
+            </a:r>
+          </a:p>
+          <a:p xmlns:a="http://schemas.openxmlformats.org/drawingml/2006/main">
+            <a:pPr>
+              <a:lnSpc>
+                <a:spcPts val="1300"/>
+              </a:lnSpc>
+              <a:buNone/>
+              <a:defRPr sz="1050">
+                <a:solidFill>
+                  <a:srgbClr val="263044"/>
+                </a:solidFill>
+                <a:latin typeface="Consolas"/>
+                <a:ea typeface="Consolas"/>
+                <a:cs typeface="Consolas"/>
+              </a:defRPr>
+            </a:pPr>
+            <a:r>
+              <a:rPr b="0">
+                <a:solidFill>
+                  <a:srgbClr val="263044"/>
+                </a:solidFill>
+              </a:rPr>
+              <a:t> </a:t>
+            </a:r>
+          </a:p>
+          <a:p xmlns:a="http://schemas.openxmlformats.org/drawingml/2006/main">
+            <a:pPr>
+              <a:lnSpc>
+                <a:spcPts val="1300"/>
+              </a:lnSpc>
+              <a:buNone/>
+              <a:defRPr sz="1050">
+                <a:solidFill>
+                  <a:srgbClr val="263044"/>
+                </a:solidFill>
+                <a:latin typeface="Consolas"/>
+                <a:ea typeface="Consolas"/>
+                <a:cs typeface="Consolas"/>
+              </a:defRPr>
+            </a:pPr>
+            <a:r>
+              <a:rPr b="0">
+                <a:solidFill>
+                  <a:srgbClr val="263044"/>
+                </a:solidFill>
+              </a:rPr>
+              <a:t>    </a:t>
+            </a:r>
+            <a:r>
+              <a:rPr b="1">
+                <a:solidFill>
+                  <a:srgbClr val="0969C3"/>
+                </a:solidFill>
+              </a:rPr>
+              <a:t>using</a:t>
+            </a:r>
+            <a:r>
+              <a:rPr b="0">
+                <a:solidFill>
+                  <a:srgbClr val="263044"/>
+                </a:solidFill>
+              </a:rPr>
+              <a:t> (</a:t>
+            </a:r>
+            <a:r>
+              <a:rPr b="0">
+                <a:solidFill>
+                  <a:srgbClr val="7651D4"/>
+                </a:solidFill>
+              </a:rPr>
+              <a:t>Assert</a:t>
+            </a:r>
+            <a:r>
+              <a:rPr b="0">
+                <a:solidFill>
+                  <a:srgbClr val="263044"/>
+                </a:solidFill>
+              </a:rPr>
               <a:t>.</a:t>
             </a:r>
             <a:r>
@@ -9760,7 +9963,7 @@
                   <a:srgbClr val="7651D4"/>
                 </a:solidFill>
               </a:rPr>
-              <a:t>Should</a:t>
+              <a:t>EnterMultipleScope</a:t>
             </a:r>
             <a:r>
               <a:rPr b="0">
@@ -9768,15 +9971,63 @@
                   <a:srgbClr val="263044"/>
                 </a:solidFill>
               </a:rPr>
-              <a:t>().</a:t>
-            </a:r>
+              <a:t>())</a:t>
+            </a:r>
+          </a:p>
+          <a:p xmlns:a="http://schemas.openxmlformats.org/drawingml/2006/main">
+            <a:pPr>
+              <a:lnSpc>
+                <a:spcPts val="1300"/>
+              </a:lnSpc>
+              <a:buNone/>
+              <a:defRPr sz="1050">
+                <a:solidFill>
+                  <a:srgbClr val="263044"/>
+                </a:solidFill>
+                <a:latin typeface="Consolas"/>
+                <a:ea typeface="Consolas"/>
+                <a:cs typeface="Consolas"/>
+              </a:defRPr>
+            </a:pPr>
             <a:r>
               <a:rPr b="0">
                 <a:solidFill>
+                  <a:srgbClr val="263044"/>
+                </a:solidFill>
+              </a:rPr>
+              <a:t>    {</a:t>
+            </a:r>
+          </a:p>
+          <a:p xmlns:a="http://schemas.openxmlformats.org/drawingml/2006/main">
+            <a:pPr>
+              <a:lnSpc>
+                <a:spcPts val="1300"/>
+              </a:lnSpc>
+              <a:buNone/>
+              <a:defRPr sz="1050">
+                <a:solidFill>
+                  <a:srgbClr val="263044"/>
+                </a:solidFill>
+                <a:latin typeface="Consolas"/>
+                <a:ea typeface="Consolas"/>
+                <a:cs typeface="Consolas"/>
+              </a:defRPr>
+            </a:pPr>
+            <a:r>
+              <a:rPr b="0">
+                <a:solidFill>
+                  <a:srgbClr val="263044"/>
+                </a:solidFill>
+              </a:rPr>
+              <a:t>        </a:t>
+            </a:r>
+            <a:r>
+              <a:rPr b="0">
+                <a:solidFill>
                   <a:srgbClr val="7651D4"/>
                 </a:solidFill>
               </a:rPr>
-              <a:t>Be</a:t>
+              <a:t>Assert</a:t>
             </a:r>
             <a:r>
               <a:rPr b="0">
@@ -9784,15 +10035,15 @@
                   <a:srgbClr val="263044"/>
                 </a:solidFill>
               </a:rPr>
-              <a:t>(</a:t>
+              <a:t>.</a:t>
             </a:r>
             <a:r>
               <a:rPr b="0">
                 <a:solidFill>
-                  <a:srgbClr val="B45309"/>
-                </a:solidFill>
-              </a:rPr>
-              <a:t>"stale_evidence"</a:t>
+                  <a:srgbClr val="7651D4"/>
+                </a:solidFill>
+              </a:rPr>
+              <a:t>That</a:t>
             </a:r>
             <a:r>
               <a:rPr b="0">
@@ -9800,11 +10051,190 @@
                   <a:srgbClr val="263044"/>
                 </a:solidFill>
               </a:rPr>
+              <a:t>(effectiveness.</a:t>
+            </a:r>
+            <a:r>
+              <a:rPr b="0">
+                <a:solidFill>
+                  <a:srgbClr val="7651D4"/>
+                </a:solidFill>
+              </a:rPr>
+              <a:t>Ratio</a:t>
+            </a:r>
+            <a:r>
+              <a:rPr b="0">
+                <a:solidFill>
+                  <a:srgbClr val="263044"/>
+                </a:solidFill>
+              </a:rPr>
+              <a:t>, </a:t>
+            </a:r>
+            <a:r>
+              <a:rPr b="0">
+                <a:solidFill>
+                  <a:srgbClr val="7651D4"/>
+                </a:solidFill>
+              </a:rPr>
+              <a:t>Is</a:t>
+            </a:r>
+            <a:r>
+              <a:rPr b="0">
+                <a:solidFill>
+                  <a:srgbClr val="263044"/>
+                </a:solidFill>
+              </a:rPr>
+              <a:t>.</a:t>
+            </a:r>
+            <a:r>
+              <a:rPr b="0">
+                <a:solidFill>
+                  <a:srgbClr val="7651D4"/>
+                </a:solidFill>
+              </a:rPr>
+              <a:t>Zero</a:t>
+            </a:r>
+            <a:r>
+              <a:rPr b="0">
+                <a:solidFill>
+                  <a:srgbClr val="263044"/>
+                </a:solidFill>
+              </a:rPr>
               <a:t>);</a:t>
             </a:r>
           </a:p>
           <a:p xmlns:a="http://schemas.openxmlformats.org/drawingml/2006/main">
             <a:pPr>
+              <a:lnSpc>
+                <a:spcPts val="1300"/>
+              </a:lnSpc>
+              <a:buNone/>
+              <a:defRPr sz="1050">
+                <a:solidFill>
+                  <a:srgbClr val="263044"/>
+                </a:solidFill>
+                <a:latin typeface="Consolas"/>
+                <a:ea typeface="Consolas"/>
+                <a:cs typeface="Consolas"/>
+              </a:defRPr>
+            </a:pPr>
+            <a:r>
+              <a:rPr b="0">
+                <a:solidFill>
+                  <a:srgbClr val="263044"/>
+                </a:solidFill>
+              </a:rPr>
+              <a:t>        </a:t>
+            </a:r>
+            <a:r>
+              <a:rPr b="0">
+                <a:solidFill>
+                  <a:srgbClr val="7651D4"/>
+                </a:solidFill>
+              </a:rPr>
+              <a:t>Assert</a:t>
+            </a:r>
+            <a:r>
+              <a:rPr b="0">
+                <a:solidFill>
+                  <a:srgbClr val="263044"/>
+                </a:solidFill>
+              </a:rPr>
+              <a:t>.</a:t>
+            </a:r>
+            <a:r>
+              <a:rPr b="0">
+                <a:solidFill>
+                  <a:srgbClr val="7651D4"/>
+                </a:solidFill>
+              </a:rPr>
+              <a:t>That</a:t>
+            </a:r>
+            <a:r>
+              <a:rPr b="0">
+                <a:solidFill>
+                  <a:srgbClr val="263044"/>
+                </a:solidFill>
+              </a:rPr>
+              <a:t>(effectiveness.</a:t>
+            </a:r>
+            <a:r>
+              <a:rPr b="0">
+                <a:solidFill>
+                  <a:srgbClr val="7651D4"/>
+                </a:solidFill>
+              </a:rPr>
+              <a:t>MeetsTarget</a:t>
+            </a:r>
+            <a:r>
+              <a:rPr b="0">
+                <a:solidFill>
+                  <a:srgbClr val="263044"/>
+                </a:solidFill>
+              </a:rPr>
+              <a:t>, </a:t>
+            </a:r>
+            <a:r>
+              <a:rPr b="0">
+                <a:solidFill>
+                  <a:srgbClr val="7651D4"/>
+                </a:solidFill>
+              </a:rPr>
+              <a:t>Is</a:t>
+            </a:r>
+            <a:r>
+              <a:rPr b="0">
+                <a:solidFill>
+                  <a:srgbClr val="263044"/>
+                </a:solidFill>
+              </a:rPr>
+              <a:t>.</a:t>
+            </a:r>
+            <a:r>
+              <a:rPr b="0">
+                <a:solidFill>
+                  <a:srgbClr val="7651D4"/>
+                </a:solidFill>
+              </a:rPr>
+              <a:t>False</a:t>
+            </a:r>
+            <a:r>
+              <a:rPr b="0">
+                <a:solidFill>
+                  <a:srgbClr val="263044"/>
+                </a:solidFill>
+              </a:rPr>
+              <a:t>);</a:t>
+            </a:r>
+          </a:p>
+          <a:p xmlns:a="http://schemas.openxmlformats.org/drawingml/2006/main">
+            <a:pPr>
+              <a:lnSpc>
+                <a:spcPts val="1300"/>
+              </a:lnSpc>
+              <a:buNone/>
+              <a:defRPr sz="1050">
+                <a:solidFill>
+                  <a:srgbClr val="263044"/>
+                </a:solidFill>
+                <a:latin typeface="Consolas"/>
+                <a:ea typeface="Consolas"/>
+                <a:cs typeface="Consolas"/>
+              </a:defRPr>
+            </a:pPr>
+            <a:r>
+              <a:rPr b="0">
+                <a:solidFill>
+                  <a:srgbClr val="263044"/>
+                </a:solidFill>
+              </a:rPr>
+              <a:t>    }</a:t>
+            </a:r>
+          </a:p>
+          <a:p xmlns:a="http://schemas.openxmlformats.org/drawingml/2006/main">
+            <a:pPr>
+              <a:lnSpc>
+                <a:spcPts val="1300"/>
+              </a:lnSpc>
               <a:buNone/>
               <a:defRPr sz="1050">
                 <a:solidFill>
@@ -9978,7 +10408,7 @@
                 <a:ea typeface="Aptos"/>
                 <a:cs typeface="Aptos"/>
               </a:rPr>
-              <a:t>Промена тока или истек рока враћа оцену на непознато док се контрола поново не провери.</a:t>
+              <a:t>Без иједног покушаја удео је нула, а циљ се не сматра испуњеним.</a:t>
             </a:r>
           </a:p>
         </p:txBody>
@@ -10135,7 +10565,7 @@
                 <a:ea typeface="Aptos"/>
                 <a:cs typeface="Aptos"/>
               </a:rPr>
-              <a:t>Тест мења једну чињеницу и очекује јасан, стабилан разлог одбијања.</a:t>
+              <a:t>Тест не дозвољава да одсуство мерења изгледа као успех контроле.</a:t>
             </a:r>
           </a:p>
         </p:txBody>
@@ -10645,7 +11075,7 @@
           <a:p xmlns:a="http://schemas.openxmlformats.org/drawingml/2006/main">
             <a:pPr algn="r">
               <a:lnSpc>
-                <a:spcPct val="100000"/>
+                <a:spcPts val="1300"/>
               </a:lnSpc>
               <a:buNone/>
               <a:defRPr sz="1050" b="0">
@@ -10672,7 +11102,7 @@
           <a:p xmlns:a="http://schemas.openxmlformats.org/drawingml/2006/main">
             <a:pPr algn="r">
               <a:lnSpc>
-                <a:spcPct val="100000"/>
+                <a:spcPts val="1300"/>
               </a:lnSpc>
               <a:buNone/>
               <a:defRPr sz="1050" b="0">
@@ -10699,7 +11129,7 @@
           <a:p xmlns:a="http://schemas.openxmlformats.org/drawingml/2006/main">
             <a:pPr algn="r">
               <a:lnSpc>
-                <a:spcPct val="100000"/>
+                <a:spcPts val="1300"/>
               </a:lnSpc>
               <a:buNone/>
               <a:defRPr sz="1050" b="0">
@@ -10726,7 +11156,7 @@
           <a:p xmlns:a="http://schemas.openxmlformats.org/drawingml/2006/main">
             <a:pPr algn="r">
               <a:lnSpc>
-                <a:spcPct val="100000"/>
+                <a:spcPts val="1300"/>
               </a:lnSpc>
               <a:buNone/>
               <a:defRPr sz="1050" b="0">
@@ -10753,7 +11183,7 @@
           <a:p xmlns:a="http://schemas.openxmlformats.org/drawingml/2006/main">
             <a:pPr algn="r">
               <a:lnSpc>
-                <a:spcPct val="100000"/>
+                <a:spcPts val="1300"/>
               </a:lnSpc>
               <a:buNone/>
               <a:defRPr sz="1050" b="0">
@@ -10780,7 +11210,7 @@
           <a:p xmlns:a="http://schemas.openxmlformats.org/drawingml/2006/main">
             <a:pPr algn="r">
               <a:lnSpc>
-                <a:spcPct val="100000"/>
+                <a:spcPts val="1300"/>
               </a:lnSpc>
               <a:buNone/>
               <a:defRPr sz="1050" b="0">
@@ -10807,7 +11237,7 @@
           <a:p xmlns:a="http://schemas.openxmlformats.org/drawingml/2006/main">
             <a:pPr algn="r">
               <a:lnSpc>
-                <a:spcPct val="100000"/>
+                <a:spcPts val="1300"/>
               </a:lnSpc>
               <a:buNone/>
               <a:defRPr sz="1050" b="0">
@@ -10834,7 +11264,7 @@
           <a:p xmlns:a="http://schemas.openxmlformats.org/drawingml/2006/main">
             <a:pPr algn="r">
               <a:lnSpc>
-                <a:spcPct val="100000"/>
+                <a:spcPts val="1300"/>
               </a:lnSpc>
               <a:buNone/>
               <a:defRPr sz="1050" b="0">
@@ -10894,6 +11324,9 @@
           <a:lstStyle xmlns:a="http://schemas.openxmlformats.org/drawingml/2006/main"/>
           <a:p xmlns:a="http://schemas.openxmlformats.org/drawingml/2006/main">
             <a:pPr>
+              <a:lnSpc>
+                <a:spcPts val="1300"/>
+              </a:lnSpc>
               <a:buNone/>
               <a:defRPr sz="1125">
                 <a:solidFill>
@@ -10915,6 +11348,9 @@
           </a:p>
           <a:p xmlns:a="http://schemas.openxmlformats.org/drawingml/2006/main">
             <a:pPr>
+              <a:lnSpc>
+                <a:spcPts val="1300"/>
+              </a:lnSpc>
               <a:buNone/>
               <a:defRPr sz="1125">
                 <a:solidFill>
@@ -10968,6 +11404,9 @@
           </a:p>
           <a:p xmlns:a="http://schemas.openxmlformats.org/drawingml/2006/main">
             <a:pPr>
+              <a:lnSpc>
+                <a:spcPts val="1300"/>
+              </a:lnSpc>
               <a:buNone/>
               <a:defRPr sz="1125">
                 <a:solidFill>
@@ -11021,6 +11460,9 @@
           </a:p>
           <a:p xmlns:a="http://schemas.openxmlformats.org/drawingml/2006/main">
             <a:pPr>
+              <a:lnSpc>
+                <a:spcPts val="1300"/>
+              </a:lnSpc>
               <a:buNone/>
               <a:defRPr sz="1125">
                 <a:solidFill>
@@ -11074,6 +11516,9 @@
           </a:p>
           <a:p xmlns:a="http://schemas.openxmlformats.org/drawingml/2006/main">
             <a:pPr>
+              <a:lnSpc>
+                <a:spcPts val="1300"/>
+              </a:lnSpc>
               <a:buNone/>
               <a:defRPr sz="1125">
                 <a:solidFill>
@@ -11127,6 +11572,9 @@
           </a:p>
           <a:p xmlns:a="http://schemas.openxmlformats.org/drawingml/2006/main">
             <a:pPr>
+              <a:lnSpc>
+                <a:spcPts val="1300"/>
+              </a:lnSpc>
               <a:buNone/>
               <a:defRPr sz="1125">
                 <a:solidFill>
@@ -11180,6 +11628,9 @@
           </a:p>
           <a:p xmlns:a="http://schemas.openxmlformats.org/drawingml/2006/main">
             <a:pPr>
+              <a:lnSpc>
+                <a:spcPts val="1300"/>
+              </a:lnSpc>
               <a:buNone/>
               <a:defRPr sz="1125">
                 <a:solidFill>
@@ -11225,6 +11676,9 @@
           </a:p>
           <a:p xmlns:a="http://schemas.openxmlformats.org/drawingml/2006/main">
             <a:pPr>
+              <a:lnSpc>
+                <a:spcPts val="1300"/>
+              </a:lnSpc>
               <a:buNone/>
               <a:defRPr sz="1125">
                 <a:solidFill>
@@ -19751,7 +20205,7 @@
                 <a:ea typeface="Aptos"/>
                 <a:cs typeface="Aptos"/>
               </a:rPr>
-              <a:t>Корелација повезује догађаје по времену, актеру и ресурсу, уз садржај појединачних порука лога.</a:t>
+              <a:t>Догађај бележи време, актера, ресурс, тип и идентификатор тока.</a:t>
             </a:r>
           </a:p>
         </p:txBody>
@@ -19975,7 +20429,7 @@
                 <a:ea typeface="Aptos"/>
                 <a:cs typeface="Aptos"/>
               </a:rPr>
-              <a:t>Корелација повезује низ догађаја у једну причу о понашању система.</a:t>
+              <a:t>Један догађај ретко је довољан за закључак; значење долази из везе са другима.</a:t>
             </a:r>
           </a:p>
         </p:txBody>
@@ -20199,7 +20653,7 @@
                 <a:ea typeface="Aptos"/>
                 <a:cs typeface="Aptos"/>
               </a:rPr>
-              <a:t>Корелациони идентификатор повезује намеру, обраду и исход једне радње.</a:t>
+              <a:t>Догађаји без идентификатора тока не могу се поуздано повезати.</a:t>
             </a:r>
           </a:p>
         </p:txBody>
@@ -20510,7 +20964,7 @@
                 <a:ea typeface="Aptos"/>
                 <a:cs typeface="Aptos"/>
               </a:rPr>
-              <a:t>Који ризик контрола ублажава, који доказ чува и који сигнал показује да је престала да ради?</a:t>
+              <a:t>Који подаци морају постојати у сваком догађају да би се касније могао повезати са другима?</a:t>
             </a:r>
           </a:p>
         </p:txBody>
@@ -20979,7 +21433,7 @@
                 <a:ea typeface="Aptos"/>
                 <a:cs typeface="Aptos"/>
               </a:rPr>
-              <a:t>Одговор са већим последицама захтева људску одлуку и јасан траг одобрења.</a:t>
+              <a:t>Корелација групише догађаје истог тока у један случај.</a:t>
             </a:r>
           </a:p>
         </p:txBody>
@@ -21203,7 +21657,7 @@
                 <a:ea typeface="Aptos"/>
                 <a:cs typeface="Aptos"/>
               </a:rPr>
-              <a:t>Мера ефективности прати да ли контрола има власника, доказ и покривеност релевантног сценарија.</a:t>
+              <a:t>Случај чува број догађаја и скуп њихових типова, без дуплирања.</a:t>
             </a:r>
           </a:p>
         </p:txBody>
@@ -21427,7 +21881,7 @@
                 <a:ea typeface="Aptos"/>
                 <a:cs typeface="Aptos"/>
               </a:rPr>
-              <a:t>Правила корелације морају бити објашњива, посебно када утичу на приоритет упозорења.</a:t>
+              <a:t>Правило корелације се тестира познатим низом догађаја и очекиваним случајем.</a:t>
             </a:r>
           </a:p>
         </p:txBody>
@@ -21738,7 +22192,7 @@
                 <a:ea typeface="Aptos"/>
                 <a:cs typeface="Aptos"/>
               </a:rPr>
-              <a:t>Који ризик контрола ублажава, који доказ чува и који сигнал показује да је престала да ради?</a:t>
+              <a:t>Који низ догађаја у вашем систему заједно значи више него сваки појединачно?</a:t>
             </a:r>
           </a:p>
         </p:txBody>
@@ -22207,7 +22661,7 @@
                 <a:ea typeface="Aptos"/>
                 <a:cs typeface="Aptos"/>
               </a:rPr>
-              <a:t>Постинцидентни преглед испитује системске и процесне узроке догађаја.</a:t>
+              <a:t>Контрола је везана за конкретан ризик који смањује и за ток на који се примењује.</a:t>
             </a:r>
           </a:p>
         </p:txBody>
@@ -22431,7 +22885,7 @@
                 <a:ea typeface="Aptos"/>
                 <a:cs typeface="Aptos"/>
               </a:rPr>
-              <a:t>Аутоматизован одговор може убрзати реакцију, али радња са великом последицом задржава људску потврду и ревизиони траг.</a:t>
+              <a:t>Ефективност је удео заустављених покушаја у односу на све покушаје.</a:t>
             </a:r>
           </a:p>
         </p:txBody>
@@ -22655,7 +23109,7 @@
                 <a:ea typeface="Aptos"/>
                 <a:cs typeface="Aptos"/>
               </a:rPr>
-              <a:t>Аутоматизација предлаже или ограничава одговор када је последица грешке велика.</a:t>
+              <a:t>Контрола која никада није била на проби не сматра се ефективном.</a:t>
             </a:r>
           </a:p>
         </p:txBody>
@@ -22966,7 +23420,7 @@
                 <a:ea typeface="Aptos"/>
                 <a:cs typeface="Aptos"/>
               </a:rPr>
-              <a:t>Који ризик контрола ублажава, који доказ чува и који сигнал показује да је престала да ради?</a:t>
+              <a:t>Којим бројем бисте показали да ваша контрола заиста зауставља покушаје?</a:t>
             </a:r>
           </a:p>
         </p:txBody>
@@ -23435,7 +23889,7 @@
                 <a:ea typeface="Aptos"/>
                 <a:cs typeface="Aptos"/>
               </a:rPr>
-              <a:t>Корелациони идентификатор повезује намеру, обраду и исход једне радње.</a:t>
+              <a:t>Доказ ефективности мора бити свеж; после промене тока оцена се поново утврђује.</a:t>
             </a:r>
           </a:p>
         </p:txBody>
@@ -23659,7 +24113,7 @@
                 <a:ea typeface="Aptos"/>
                 <a:cs typeface="Aptos"/>
               </a:rPr>
-              <a:t>Правила корелације морају бити објашњива, посебно када утичу на приоритет упозорења.</a:t>
+              <a:t>Циљни удео је унапред одређен, па се резултат пореди са прагом, а не са утиском.</a:t>
             </a:r>
           </a:p>
         </p:txBody>
@@ -23883,7 +24337,7 @@
                 <a:ea typeface="Aptos"/>
                 <a:cs typeface="Aptos"/>
               </a:rPr>
-              <a:t>Аутоматизација предлаже или ограничава одговор када је последица грешке велика.</a:t>
+              <a:t>Резултат мерења води до корекције контроле или до прихватања преосталог ризика.</a:t>
             </a:r>
           </a:p>
         </p:txBody>
